--- a/Lectures/DiD_Best_ECON4370  -  Repaired.pptx
+++ b/Lectures/DiD_Best_ECON4370  -  Repaired.pptx
@@ -7389,7 +7389,7 @@
         </p:nvSpPr>
         <p:spPr>
           <a:xfrm>
-            <a:off x="6805749" y="2226056"/>
+            <a:off x="6622868" y="2770632"/>
             <a:ext cx="1188720" cy="256032"/>
           </a:xfrm>
           <a:prstGeom prst="rect">
@@ -7425,7 +7425,7 @@
         </p:nvSpPr>
         <p:spPr>
           <a:xfrm>
-            <a:off x="1286691" y="2619683"/>
+            <a:off x="1286691" y="2362899"/>
             <a:ext cx="2481943" cy="0"/>
           </a:xfrm>
           <a:prstGeom prst="line">
@@ -7485,7 +7485,7 @@
         </p:nvSpPr>
         <p:spPr>
           <a:xfrm>
-            <a:off x="6805749" y="1340685"/>
+            <a:off x="6558984" y="1535572"/>
             <a:ext cx="1188720" cy="256032"/>
           </a:xfrm>
           <a:prstGeom prst="rect">
@@ -7603,7 +7603,7 @@
         </p:nvSpPr>
         <p:spPr>
           <a:xfrm>
-            <a:off x="1352006" y="2518591"/>
+            <a:off x="521208" y="2568594"/>
             <a:ext cx="1005840" cy="347472"/>
           </a:xfrm>
           <a:prstGeom prst="rect">

--- a/Lectures/DiD_Best_ECON4370  -  Repaired.pptx
+++ b/Lectures/DiD_Best_ECON4370  -  Repaired.pptx
@@ -7485,7 +7485,7 @@
         </p:nvSpPr>
         <p:spPr>
           <a:xfrm>
-            <a:off x="6558984" y="1535572"/>
+            <a:off x="6694714" y="1801368"/>
             <a:ext cx="1188720" cy="256032"/>
           </a:xfrm>
           <a:prstGeom prst="rect">
@@ -7521,7 +7521,7 @@
         </p:nvSpPr>
         <p:spPr>
           <a:xfrm>
-            <a:off x="5858691" y="1712178"/>
+            <a:off x="5706291" y="2100144"/>
             <a:ext cx="0" cy="442686"/>
           </a:xfrm>
           <a:prstGeom prst="line">
@@ -7553,7 +7553,7 @@
         </p:nvSpPr>
         <p:spPr>
           <a:xfrm>
-            <a:off x="5950131" y="1748754"/>
+            <a:off x="5950132" y="2103120"/>
             <a:ext cx="1005840" cy="384048"/>
           </a:xfrm>
           <a:prstGeom prst="rect">
@@ -9559,7 +9559,7 @@
         </p:nvSpPr>
         <p:spPr>
           <a:xfrm>
-            <a:off x="6886085" y="2479911"/>
+            <a:off x="6886085" y="3357081"/>
             <a:ext cx="1097280" cy="274320"/>
           </a:xfrm>
           <a:prstGeom prst="rect">
@@ -9655,7 +9655,7 @@
         </p:nvSpPr>
         <p:spPr>
           <a:xfrm>
-            <a:off x="6886085" y="1576397"/>
+            <a:off x="6880859" y="2029026"/>
             <a:ext cx="1143000" cy="274320"/>
           </a:xfrm>
           <a:prstGeom prst="rect">
@@ -9721,7 +9721,7 @@
         </p:nvSpPr>
         <p:spPr>
           <a:xfrm>
-            <a:off x="6886085" y="2178739"/>
+            <a:off x="6904156" y="2543919"/>
             <a:ext cx="1325880" cy="438912"/>
           </a:xfrm>
           <a:prstGeom prst="rect">
@@ -9771,7 +9771,7 @@
         </p:nvSpPr>
         <p:spPr>
           <a:xfrm>
-            <a:off x="6253190" y="1821978"/>
+            <a:off x="6057247" y="2195431"/>
             <a:ext cx="0" cy="542109"/>
           </a:xfrm>
           <a:prstGeom prst="line">
@@ -9803,7 +9803,7 @@
         </p:nvSpPr>
         <p:spPr>
           <a:xfrm>
-            <a:off x="6344630" y="1891865"/>
+            <a:off x="6168283" y="2271195"/>
             <a:ext cx="822960" cy="411480"/>
           </a:xfrm>
           <a:prstGeom prst="rect">
@@ -10406,7 +10406,7 @@
         </p:nvSpPr>
         <p:spPr>
           <a:xfrm>
-            <a:off x="6886085" y="2183674"/>
+            <a:off x="6886085" y="2861492"/>
             <a:ext cx="1097280" cy="274320"/>
           </a:xfrm>
           <a:prstGeom prst="rect">
@@ -10441,9 +10441,9 @@
           <p:nvPr/>
         </p:nvSpPr>
         <p:spPr>
-          <a:xfrm>
-            <a:off x="1256647" y="2796903"/>
-            <a:ext cx="2531582" cy="0"/>
+          <a:xfrm flipV="1">
+            <a:off x="1256647" y="1992955"/>
+            <a:ext cx="2458415" cy="803948"/>
           </a:xfrm>
           <a:prstGeom prst="line">
             <a:avLst/>
@@ -10502,7 +10502,7 @@
         </p:nvSpPr>
         <p:spPr>
           <a:xfrm>
-            <a:off x="6886085" y="1279144"/>
+            <a:off x="6852775" y="1705356"/>
             <a:ext cx="1097280" cy="274320"/>
           </a:xfrm>
           <a:prstGeom prst="rect">
